--- a/@Materi Kuliah/Materi_Teori_Risiko/Presentasi_Teori_Risiko_Profesional_dari_HTML.pptx
+++ b/@Materi Kuliah/Materi_Teori_Risiko/Presentasi_Teori_Risiko_Profesional_dari_HTML.pptx
@@ -2,131 +2,36 @@
 <file path=ppt/presentation.xml><?xml version="1.0" encoding="utf-8"?>
 <p:presentation xmlns:p="http://schemas.openxmlformats.org/presentationml/2006/main">
   <p:sldMasterIdLst>
-    <p:sldMasterId xmlns:r="http://schemas.openxmlformats.org/officeDocument/2006/relationships" id="2147483648" r:id="Rdb12bac4a38348b4"/>
+    <p:sldMasterId xmlns:r="http://schemas.openxmlformats.org/officeDocument/2006/relationships" id="2147483648" r:id="Rb97910bee36044bd"/>
   </p:sldMasterIdLst>
   <p:notesMasterIdLst>
-    <p:notesMasterId xmlns:r="http://schemas.openxmlformats.org/officeDocument/2006/relationships" r:id="Rcf2d7715030b4bd8"/>
+    <p:notesMasterId xmlns:r="http://schemas.openxmlformats.org/officeDocument/2006/relationships" r:id="R9f0eb2788665426e"/>
   </p:notesMasterIdLst>
   <p:sldIdLst>
-    <p:sldId xmlns:r="http://schemas.openxmlformats.org/officeDocument/2006/relationships" id="256" r:id="R4e65620b71c648df"/>
-    <p:sldId xmlns:r="http://schemas.openxmlformats.org/officeDocument/2006/relationships" id="257" r:id="Rda2fcaaf6d464f70"/>
-    <p:sldId xmlns:r="http://schemas.openxmlformats.org/officeDocument/2006/relationships" id="258" r:id="R76fc270acf70408c"/>
-    <p:sldId xmlns:r="http://schemas.openxmlformats.org/officeDocument/2006/relationships" id="259" r:id="R416c6e61712e4d66"/>
-    <p:sldId xmlns:r="http://schemas.openxmlformats.org/officeDocument/2006/relationships" id="260" r:id="Ra11aa4bf1b3f4ab0"/>
-    <p:sldId xmlns:r="http://schemas.openxmlformats.org/officeDocument/2006/relationships" id="261" r:id="Rf70896064b6f4776"/>
-    <p:sldId xmlns:r="http://schemas.openxmlformats.org/officeDocument/2006/relationships" id="262" r:id="R45dedfc220804337"/>
-    <p:sldId xmlns:r="http://schemas.openxmlformats.org/officeDocument/2006/relationships" id="263" r:id="Rd55e5b69e66a4f5c"/>
-    <p:sldId xmlns:r="http://schemas.openxmlformats.org/officeDocument/2006/relationships" id="264" r:id="R053736b606e24d9c"/>
-    <p:sldId xmlns:r="http://schemas.openxmlformats.org/officeDocument/2006/relationships" id="265" r:id="R2eaacf0a379b48f8"/>
-    <p:sldId xmlns:r="http://schemas.openxmlformats.org/officeDocument/2006/relationships" id="266" r:id="R8b63c8ef37cb4f60"/>
-    <p:sldId xmlns:r="http://schemas.openxmlformats.org/officeDocument/2006/relationships" id="267" r:id="Rd3b9ff0bf1744e0a"/>
-    <p:sldId xmlns:r="http://schemas.openxmlformats.org/officeDocument/2006/relationships" id="268" r:id="R387418a85e5242d8"/>
-    <p:sldId xmlns:r="http://schemas.openxmlformats.org/officeDocument/2006/relationships" id="269" r:id="Rba086ee49be64c24"/>
-    <p:sldId xmlns:r="http://schemas.openxmlformats.org/officeDocument/2006/relationships" id="270" r:id="R2cd9da71c1e5460a"/>
-    <p:sldId xmlns:r="http://schemas.openxmlformats.org/officeDocument/2006/relationships" id="271" r:id="R5eed645a98a14e8d"/>
-    <p:sldId xmlns:r="http://schemas.openxmlformats.org/officeDocument/2006/relationships" id="272" r:id="R46a80307cccc4692"/>
-    <p:sldId xmlns:r="http://schemas.openxmlformats.org/officeDocument/2006/relationships" id="273" r:id="R4cccca983d3947a9"/>
-    <p:sldId xmlns:r="http://schemas.openxmlformats.org/officeDocument/2006/relationships" id="274" r:id="R515df67e9e574d4f"/>
-    <p:sldId xmlns:r="http://schemas.openxmlformats.org/officeDocument/2006/relationships" id="275" r:id="Rc5bfa69cfeaa44a0"/>
-    <p:sldId xmlns:r="http://schemas.openxmlformats.org/officeDocument/2006/relationships" id="276" r:id="Rbba305e6070547ff"/>
+    <p:sldId xmlns:r="http://schemas.openxmlformats.org/officeDocument/2006/relationships" id="256" r:id="R9a638042a1a345fa"/>
+    <p:sldId xmlns:r="http://schemas.openxmlformats.org/officeDocument/2006/relationships" id="257" r:id="R306c29a6829647fd"/>
+    <p:sldId xmlns:r="http://schemas.openxmlformats.org/officeDocument/2006/relationships" id="258" r:id="Rabded83dbbf7402c"/>
+    <p:sldId xmlns:r="http://schemas.openxmlformats.org/officeDocument/2006/relationships" id="259" r:id="Rba66a8e8c85744d5"/>
+    <p:sldId xmlns:r="http://schemas.openxmlformats.org/officeDocument/2006/relationships" id="260" r:id="R14091bb92de543df"/>
+    <p:sldId xmlns:r="http://schemas.openxmlformats.org/officeDocument/2006/relationships" id="261" r:id="Rd4bd31fa0a464a96"/>
+    <p:sldId xmlns:r="http://schemas.openxmlformats.org/officeDocument/2006/relationships" id="262" r:id="R62b2f758ea424274"/>
+    <p:sldId xmlns:r="http://schemas.openxmlformats.org/officeDocument/2006/relationships" id="263" r:id="R6288edef38e14951"/>
+    <p:sldId xmlns:r="http://schemas.openxmlformats.org/officeDocument/2006/relationships" id="264" r:id="R0327332a8c734a1f"/>
+    <p:sldId xmlns:r="http://schemas.openxmlformats.org/officeDocument/2006/relationships" id="265" r:id="Re6d49510bb544b40"/>
+    <p:sldId xmlns:r="http://schemas.openxmlformats.org/officeDocument/2006/relationships" id="266" r:id="Rf691657ae3bb44f4"/>
+    <p:sldId xmlns:r="http://schemas.openxmlformats.org/officeDocument/2006/relationships" id="267" r:id="R7a5f6ebee5d44071"/>
+    <p:sldId xmlns:r="http://schemas.openxmlformats.org/officeDocument/2006/relationships" id="268" r:id="R073677d3c8324b56"/>
+    <p:sldId xmlns:r="http://schemas.openxmlformats.org/officeDocument/2006/relationships" id="269" r:id="R08b5554eb72249f0"/>
+    <p:sldId xmlns:r="http://schemas.openxmlformats.org/officeDocument/2006/relationships" id="270" r:id="R0549a320272d483a"/>
+    <p:sldId xmlns:r="http://schemas.openxmlformats.org/officeDocument/2006/relationships" id="271" r:id="Rdf7f1633aaee4183"/>
+    <p:sldId xmlns:r="http://schemas.openxmlformats.org/officeDocument/2006/relationships" id="272" r:id="R698fab832c004e54"/>
+    <p:sldId xmlns:r="http://schemas.openxmlformats.org/officeDocument/2006/relationships" id="273" r:id="R6b4908e9210c4409"/>
+    <p:sldId xmlns:r="http://schemas.openxmlformats.org/officeDocument/2006/relationships" id="274" r:id="R643fef40706e48ee"/>
+    <p:sldId xmlns:r="http://schemas.openxmlformats.org/officeDocument/2006/relationships" id="275" r:id="R381e5b30f80e4c18"/>
+    <p:sldId xmlns:r="http://schemas.openxmlformats.org/officeDocument/2006/relationships" id="276" r:id="Rb7f7fdfd906c4cbb"/>
   </p:sldIdLst>
   <p:sldSz cx="12192000" cy="6858000"/>
   <p:notesSz cx="6858000" cy="9144000"/>
-  <p:defaultTextStyle>
-    <a:defPPr xmlns:a="http://schemas.openxmlformats.org/drawingml/2006/main">
-      <a:defRPr lang="en-US"/>
-    </a:defPPr>
-    <a:lvl1pPr xmlns:a="http://schemas.openxmlformats.org/drawingml/2006/main" marL="0" indent="0" algn="l" defTabSz="914400">
-      <a:defRPr sz="1800" kern="1200">
-        <a:solidFill>
-          <a:schemeClr val="tx1"/>
-        </a:solidFill>
-        <a:latin typeface="+mn-lt"/>
-        <a:ea typeface="+mn-ea"/>
-        <a:cs typeface="+mn-cs"/>
-      </a:defRPr>
-    </a:lvl1pPr>
-    <a:lvl2pPr xmlns:a="http://schemas.openxmlformats.org/drawingml/2006/main" marL="457200" indent="0" algn="l" defTabSz="914400">
-      <a:defRPr sz="1800" kern="1200">
-        <a:solidFill>
-          <a:schemeClr val="tx1"/>
-        </a:solidFill>
-        <a:latin typeface="+mn-lt"/>
-        <a:ea typeface="+mn-ea"/>
-        <a:cs typeface="+mn-cs"/>
-      </a:defRPr>
-    </a:lvl2pPr>
-    <a:lvl3pPr xmlns:a="http://schemas.openxmlformats.org/drawingml/2006/main" marL="914400" indent="0" algn="l" defTabSz="914400">
-      <a:defRPr sz="1800" kern="1200">
-        <a:solidFill>
-          <a:schemeClr val="tx1"/>
-        </a:solidFill>
-        <a:latin typeface="+mn-lt"/>
-        <a:ea typeface="+mn-ea"/>
-        <a:cs typeface="+mn-cs"/>
-      </a:defRPr>
-    </a:lvl3pPr>
-    <a:lvl4pPr xmlns:a="http://schemas.openxmlformats.org/drawingml/2006/main" marL="1371600" indent="0" algn="l" defTabSz="914400">
-      <a:defRPr sz="1800" kern="1200">
-        <a:solidFill>
-          <a:schemeClr val="tx1"/>
-        </a:solidFill>
-        <a:latin typeface="+mn-lt"/>
-        <a:ea typeface="+mn-ea"/>
-        <a:cs typeface="+mn-cs"/>
-      </a:defRPr>
-    </a:lvl4pPr>
-    <a:lvl5pPr xmlns:a="http://schemas.openxmlformats.org/drawingml/2006/main" marL="1828800" indent="0" algn="l" defTabSz="914400">
-      <a:defRPr sz="1800" kern="1200">
-        <a:solidFill>
-          <a:schemeClr val="tx1"/>
-        </a:solidFill>
-        <a:latin typeface="+mn-lt"/>
-        <a:ea typeface="+mn-ea"/>
-        <a:cs typeface="+mn-cs"/>
-      </a:defRPr>
-    </a:lvl5pPr>
-    <a:lvl6pPr xmlns:a="http://schemas.openxmlformats.org/drawingml/2006/main" marL="2286000" indent="0" algn="l" defTabSz="914400">
-      <a:defRPr sz="1800" kern="1200">
-        <a:solidFill>
-          <a:schemeClr val="tx1"/>
-        </a:solidFill>
-        <a:latin typeface="+mn-lt"/>
-        <a:ea typeface="+mn-ea"/>
-        <a:cs typeface="+mn-cs"/>
-      </a:defRPr>
-    </a:lvl6pPr>
-    <a:lvl7pPr xmlns:a="http://schemas.openxmlformats.org/drawingml/2006/main" marL="2743200" indent="0" algn="l" defTabSz="914400">
-      <a:defRPr sz="1800" kern="1200">
-        <a:solidFill>
-          <a:schemeClr val="tx1"/>
-        </a:solidFill>
-        <a:latin typeface="+mn-lt"/>
-        <a:ea typeface="+mn-ea"/>
-        <a:cs typeface="+mn-cs"/>
-      </a:defRPr>
-    </a:lvl7pPr>
-    <a:lvl8pPr xmlns:a="http://schemas.openxmlformats.org/drawingml/2006/main" marL="3200400" indent="0" algn="l" defTabSz="914400">
-      <a:defRPr sz="1800" kern="1200">
-        <a:solidFill>
-          <a:schemeClr val="tx1"/>
-        </a:solidFill>
-        <a:latin typeface="+mn-lt"/>
-        <a:ea typeface="+mn-ea"/>
-        <a:cs typeface="+mn-cs"/>
-      </a:defRPr>
-    </a:lvl8pPr>
-    <a:lvl9pPr xmlns:a="http://schemas.openxmlformats.org/drawingml/2006/main" marL="3657600" indent="0" algn="l" defTabSz="914400">
-      <a:defRPr sz="1800" kern="1200">
-        <a:solidFill>
-          <a:schemeClr val="tx1"/>
-        </a:solidFill>
-        <a:latin typeface="+mn-lt"/>
-        <a:ea typeface="+mn-ea"/>
-        <a:cs typeface="+mn-cs"/>
-      </a:defRPr>
-    </a:lvl9pPr>
-  </p:defaultTextStyle>
 </p:presentation>
 </file>
 
@@ -1453,7 +1358,26 @@
         <p:txBody>
           <a:bodyPr xmlns:a="http://schemas.openxmlformats.org/drawingml/2006/main"/>
           <a:lstStyle xmlns:a="http://schemas.openxmlformats.org/drawingml/2006/main"/>
-          <a:p xmlns:a="http://schemas.openxmlformats.org/drawingml/2006/main"/>
+          <a:p xmlns:a="http://schemas.openxmlformats.org/drawingml/2006/main">
+            <a:r>
+              <a:t>[Sources]</a:t>
+            </a:r>
+          </a:p>
+          <a:p xmlns:a="http://schemas.openxmlformats.org/drawingml/2006/main">
+            <a:r>
+              <a:t>- RPS mata kuliah Revisi AI 2026, Program Studi S2 Statistika Terapan FMIPA Universitas Padjadjaran.</a:t>
+            </a:r>
+          </a:p>
+          <a:p xmlns:a="http://schemas.openxmlformats.org/drawingml/2006/main">
+            <a:r>
+              <a:t>[/Sources]</a:t>
+            </a:r>
+          </a:p>
+          <a:p xmlns:a="http://schemas.openxmlformats.org/drawingml/2006/main">
+            <a:r>
+              <a:t>Penutup: CPL tetap. AI adalah akselerator ketercapaian CPMK/Sub-CPMK, bukan pengganti penalaran statistika. Tekankan kewajiban prompt log ringkas, sumber, kode/notebook reproducible, validasi, dan audit trail.</a:t>
+            </a:r>
+          </a:p>
         </p:txBody>
       </p:sp>
       <p:sp>
@@ -2010,8 +1934,8 @@
   </p:cSld>
   <p:clrMap bg1="lt1" tx1="dk1" bg2="lt2" tx2="dk2" accent1="accent1" accent2="accent2" accent3="accent3" accent4="accent4" accent5="accent5" accent6="accent6" hlink="hlink" folHlink="folHlink"/>
   <p:sldLayoutIdLst>
-    <p:sldLayoutId xmlns:r="http://schemas.openxmlformats.org/officeDocument/2006/relationships" id="2147483649" r:id="R4f8d4a3b94a3412d"/>
-    <p:sldLayoutId xmlns:r="http://schemas.openxmlformats.org/officeDocument/2006/relationships" id="2147483650" r:id="Ra8e65d81d45e4b9e"/>
+    <p:sldLayoutId xmlns:r="http://schemas.openxmlformats.org/officeDocument/2006/relationships" id="2147483649" r:id="Rc1263103f6994ed6"/>
+    <p:sldLayoutId xmlns:r="http://schemas.openxmlformats.org/officeDocument/2006/relationships" id="2147483650" r:id="Rb9b19d0039714571"/>
   </p:sldLayoutIdLst>
   <p:hf sldNum="0" hdr="0" ftr="0" dt="0"/>
   <p:txStyles>
@@ -2577,7 +2501,7 @@
           <p:nvPr/>
         </p:nvPicPr>
         <p:blipFill>
-          <a:blip xmlns:r="http://schemas.openxmlformats.org/officeDocument/2006/relationships" xmlns:a="http://schemas.openxmlformats.org/drawingml/2006/main" r:embed="Rda99269c39f14764"/>
+          <a:blip xmlns:r="http://schemas.openxmlformats.org/officeDocument/2006/relationships" xmlns:a="http://schemas.openxmlformats.org/drawingml/2006/main" r:embed="R65573c1036c64fcf"/>
           <a:stretch xmlns:a="http://schemas.openxmlformats.org/drawingml/2006/main">
             <a:fillRect l="0" t="0" r="0" b="0"/>
           </a:stretch>
@@ -2723,7 +2647,7 @@
           <p:nvPr/>
         </p:nvPicPr>
         <p:blipFill>
-          <a:blip xmlns:r="http://schemas.openxmlformats.org/officeDocument/2006/relationships" xmlns:a="http://schemas.openxmlformats.org/drawingml/2006/main" r:embed="R4c2ad1ae2f8f477c"/>
+          <a:blip xmlns:r="http://schemas.openxmlformats.org/officeDocument/2006/relationships" xmlns:a="http://schemas.openxmlformats.org/drawingml/2006/main" r:embed="R9e12d9bcf7be4648"/>
           <a:stretch xmlns:a="http://schemas.openxmlformats.org/drawingml/2006/main">
             <a:fillRect l="0" t="0" r="0" b="0"/>
           </a:stretch>
@@ -3329,7 +3253,7 @@
           <p:nvPr/>
         </p:nvPicPr>
         <p:blipFill>
-          <a:blip xmlns:r="http://schemas.openxmlformats.org/officeDocument/2006/relationships" xmlns:a="http://schemas.openxmlformats.org/drawingml/2006/main" r:embed="Rc42bcf4285064c0a"/>
+          <a:blip xmlns:r="http://schemas.openxmlformats.org/officeDocument/2006/relationships" xmlns:a="http://schemas.openxmlformats.org/drawingml/2006/main" r:embed="R19d6a543a39e40e2"/>
           <a:stretch xmlns:a="http://schemas.openxmlformats.org/drawingml/2006/main">
             <a:fillRect l="0" t="0" r="0" b="0"/>
           </a:stretch>
@@ -5479,7 +5403,7 @@
           <p:nvPr/>
         </p:nvPicPr>
         <p:blipFill>
-          <a:blip xmlns:r="http://schemas.openxmlformats.org/officeDocument/2006/relationships" xmlns:a="http://schemas.openxmlformats.org/drawingml/2006/main" r:embed="R59d1fe24d1d04fa5"/>
+          <a:blip xmlns:r="http://schemas.openxmlformats.org/officeDocument/2006/relationships" xmlns:a="http://schemas.openxmlformats.org/drawingml/2006/main" r:embed="R5444c1afbf1142b6"/>
           <a:stretch xmlns:a="http://schemas.openxmlformats.org/drawingml/2006/main">
             <a:fillRect l="0" t="0" r="0" b="0"/>
           </a:stretch>
@@ -5758,7 +5682,7 @@
           <p:nvPr/>
         </p:nvPicPr>
         <p:blipFill>
-          <a:blip xmlns:r="http://schemas.openxmlformats.org/officeDocument/2006/relationships" xmlns:a="http://schemas.openxmlformats.org/drawingml/2006/main" r:embed="R69e90230121847e8"/>
+          <a:blip xmlns:r="http://schemas.openxmlformats.org/officeDocument/2006/relationships" xmlns:a="http://schemas.openxmlformats.org/drawingml/2006/main" r:embed="R99d4bd86b7ff4af6"/>
           <a:stretch xmlns:a="http://schemas.openxmlformats.org/drawingml/2006/main">
             <a:fillRect l="0" t="0" r="0" b="0"/>
           </a:stretch>
@@ -7292,7 +7216,7 @@
           <p:nvPr/>
         </p:nvPicPr>
         <p:blipFill>
-          <a:blip xmlns:r="http://schemas.openxmlformats.org/officeDocument/2006/relationships" xmlns:a="http://schemas.openxmlformats.org/drawingml/2006/main" r:embed="R2d73c0e378e74f16"/>
+          <a:blip xmlns:r="http://schemas.openxmlformats.org/officeDocument/2006/relationships" xmlns:a="http://schemas.openxmlformats.org/drawingml/2006/main" r:embed="R6581fa93f2594afd"/>
           <a:stretch xmlns:a="http://schemas.openxmlformats.org/drawingml/2006/main">
             <a:fillRect l="0" t="0" r="0" b="0"/>
           </a:stretch>
@@ -8461,7 +8385,7 @@
           <p:nvPr/>
         </p:nvPicPr>
         <p:blipFill>
-          <a:blip xmlns:r="http://schemas.openxmlformats.org/officeDocument/2006/relationships" xmlns:a="http://schemas.openxmlformats.org/drawingml/2006/main" r:embed="R7e82715882334bf5"/>
+          <a:blip xmlns:r="http://schemas.openxmlformats.org/officeDocument/2006/relationships" xmlns:a="http://schemas.openxmlformats.org/drawingml/2006/main" r:embed="Rd80283ebe50b4003"/>
           <a:stretch xmlns:a="http://schemas.openxmlformats.org/drawingml/2006/main">
             <a:fillRect l="0" t="0" r="0" b="0"/>
           </a:stretch>
@@ -9688,7 +9612,7 @@
           <p:nvPr/>
         </p:nvPicPr>
         <p:blipFill>
-          <a:blip xmlns:r="http://schemas.openxmlformats.org/officeDocument/2006/relationships" xmlns:a="http://schemas.openxmlformats.org/drawingml/2006/main" r:embed="Re2aa298418b44082"/>
+          <a:blip xmlns:r="http://schemas.openxmlformats.org/officeDocument/2006/relationships" xmlns:a="http://schemas.openxmlformats.org/drawingml/2006/main" r:embed="R399cc00fb5e347e5"/>
           <a:stretch xmlns:a="http://schemas.openxmlformats.org/drawingml/2006/main">
             <a:fillRect l="0" t="0" r="0" b="0"/>
           </a:stretch>
@@ -10893,7 +10817,7 @@
           <p:nvPr/>
         </p:nvPicPr>
         <p:blipFill>
-          <a:blip xmlns:r="http://schemas.openxmlformats.org/officeDocument/2006/relationships" xmlns:a="http://schemas.openxmlformats.org/drawingml/2006/main" r:embed="R125e135568f34ed3"/>
+          <a:blip xmlns:r="http://schemas.openxmlformats.org/officeDocument/2006/relationships" xmlns:a="http://schemas.openxmlformats.org/drawingml/2006/main" r:embed="R1f8ba163e251407b"/>
           <a:stretch xmlns:a="http://schemas.openxmlformats.org/drawingml/2006/main">
             <a:fillRect l="0" t="0" r="0" b="0"/>
           </a:stretch>
@@ -11172,7 +11096,7 @@
           <p:nvPr/>
         </p:nvPicPr>
         <p:blipFill>
-          <a:blip xmlns:r="http://schemas.openxmlformats.org/officeDocument/2006/relationships" xmlns:a="http://schemas.openxmlformats.org/drawingml/2006/main" r:embed="R893d5c50d1784e4e"/>
+          <a:blip xmlns:r="http://schemas.openxmlformats.org/officeDocument/2006/relationships" xmlns:a="http://schemas.openxmlformats.org/drawingml/2006/main" r:embed="R4cbc53e824ea4993"/>
           <a:stretch xmlns:a="http://schemas.openxmlformats.org/drawingml/2006/main">
             <a:fillRect l="0" t="0" r="0" b="0"/>
           </a:stretch>
@@ -12717,7 +12641,7 @@
           <p:nvPr/>
         </p:nvPicPr>
         <p:blipFill>
-          <a:blip xmlns:r="http://schemas.openxmlformats.org/officeDocument/2006/relationships" xmlns:a="http://schemas.openxmlformats.org/drawingml/2006/main" r:embed="R6dec4ade1a3f4418"/>
+          <a:blip xmlns:r="http://schemas.openxmlformats.org/officeDocument/2006/relationships" xmlns:a="http://schemas.openxmlformats.org/drawingml/2006/main" r:embed="Re4e72a3e01924a4f"/>
           <a:stretch xmlns:a="http://schemas.openxmlformats.org/drawingml/2006/main">
             <a:fillRect l="0" t="0" r="0" b="0"/>
           </a:stretch>
@@ -14734,7 +14658,7 @@
           <p:nvPr/>
         </p:nvPicPr>
         <p:blipFill>
-          <a:blip xmlns:r="http://schemas.openxmlformats.org/officeDocument/2006/relationships" xmlns:a="http://schemas.openxmlformats.org/drawingml/2006/main" r:embed="R5b1636c2e3014b85"/>
+          <a:blip xmlns:r="http://schemas.openxmlformats.org/officeDocument/2006/relationships" xmlns:a="http://schemas.openxmlformats.org/drawingml/2006/main" r:embed="Rdabd3bceb7134adb"/>
           <a:stretch xmlns:a="http://schemas.openxmlformats.org/drawingml/2006/main">
             <a:fillRect l="0" t="0" r="0" b="0"/>
           </a:stretch>
@@ -15961,7 +15885,7 @@
           <p:nvPr/>
         </p:nvPicPr>
         <p:blipFill>
-          <a:blip xmlns:r="http://schemas.openxmlformats.org/officeDocument/2006/relationships" xmlns:a="http://schemas.openxmlformats.org/drawingml/2006/main" r:embed="R097f5586b1644d2a"/>
+          <a:blip xmlns:r="http://schemas.openxmlformats.org/officeDocument/2006/relationships" xmlns:a="http://schemas.openxmlformats.org/drawingml/2006/main" r:embed="R8fd78a0a89b94ff8"/>
           <a:stretch xmlns:a="http://schemas.openxmlformats.org/drawingml/2006/main">
             <a:fillRect l="0" t="0" r="0" b="0"/>
           </a:stretch>
@@ -17102,7 +17026,7 @@
           <p:nvPr/>
         </p:nvPicPr>
         <p:blipFill>
-          <a:blip xmlns:r="http://schemas.openxmlformats.org/officeDocument/2006/relationships" xmlns:a="http://schemas.openxmlformats.org/drawingml/2006/main" r:embed="R08fa58637bc44faf"/>
+          <a:blip xmlns:r="http://schemas.openxmlformats.org/officeDocument/2006/relationships" xmlns:a="http://schemas.openxmlformats.org/drawingml/2006/main" r:embed="Racb902bfc66c4d2d"/>
           <a:stretch xmlns:a="http://schemas.openxmlformats.org/drawingml/2006/main">
             <a:fillRect l="0" t="0" r="0" b="0"/>
           </a:stretch>
@@ -18567,7 +18491,7 @@
           <p:nvPr/>
         </p:nvPicPr>
         <p:blipFill>
-          <a:blip xmlns:r="http://schemas.openxmlformats.org/officeDocument/2006/relationships" xmlns:a="http://schemas.openxmlformats.org/drawingml/2006/main" r:embed="Reaf4d070dad24eef"/>
+          <a:blip xmlns:r="http://schemas.openxmlformats.org/officeDocument/2006/relationships" xmlns:a="http://schemas.openxmlformats.org/drawingml/2006/main" r:embed="Ra9c380cd8e8745c2"/>
           <a:stretch xmlns:a="http://schemas.openxmlformats.org/drawingml/2006/main">
             <a:fillRect l="0" t="0" r="0" b="0"/>
           </a:stretch>
@@ -18713,7 +18637,7 @@
           <p:nvPr/>
         </p:nvPicPr>
         <p:blipFill>
-          <a:blip xmlns:r="http://schemas.openxmlformats.org/officeDocument/2006/relationships" xmlns:a="http://schemas.openxmlformats.org/drawingml/2006/main" r:embed="R71a82074d31a489f"/>
+          <a:blip xmlns:r="http://schemas.openxmlformats.org/officeDocument/2006/relationships" xmlns:a="http://schemas.openxmlformats.org/drawingml/2006/main" r:embed="R5c03c63addcf4648"/>
           <a:stretch xmlns:a="http://schemas.openxmlformats.org/drawingml/2006/main">
             <a:fillRect l="0" t="0" r="0" b="0"/>
           </a:stretch>
@@ -18817,7 +18741,7 @@
                 <a:ea typeface="Aptos Display"/>
                 <a:cs typeface="Aptos Display"/>
               </a:rPr>
-              <a:t>Dari data menuju</a:t>
+              <a:t>AI mempercepat proses,</a:t>
             </a:r>
           </a:p>
           <a:p xmlns:a="http://schemas.openxmlformats.org/drawingml/2006/main">
@@ -18833,7 +18757,7 @@
                 <a:ea typeface="Aptos Display"/>
                 <a:cs typeface="Aptos Display"/>
               </a:rPr>
-              <a:t>keputusan yang dapat diuji</a:t>
+              <a:t>penalaran tetap memimpin</a:t>
             </a:r>
           </a:p>
         </p:txBody>
@@ -18900,7 +18824,7 @@
         </p:spPr>
         <p:txBody>
           <a:bodyPr xmlns:a="http://schemas.openxmlformats.org/drawingml/2006/main" wrap="square" lIns="635" tIns="635" rIns="635" bIns="635" anchor="t">
-            <a:normAutofit fontScale="100000"/>
+            <a:normAutofit fontScale="93620"/>
           </a:bodyPr>
           <a:lstStyle xmlns:a="http://schemas.openxmlformats.org/drawingml/2006/main"/>
           <a:p xmlns:a="http://schemas.openxmlformats.org/drawingml/2006/main">
@@ -18916,7 +18840,7 @@
                 <a:ea typeface="Aptos"/>
                 <a:cs typeface="Aptos"/>
               </a:rPr>
-              <a:t>Teori Risiko menghubungkan teori, data, metode, validasi, dan komunikasi untuk menghasilkan keputusan yang sahih, dapat direplikasi, dan bertanggung jawab.</a:t>
+              <a:t>Teori Risiko memadukan teori, data, komputasi, validasi, dan komunikasi. AI mempercepat eksplorasi dan pemeriksaan awal; mahasiswa tetap memverifikasi asumsi, kode, hasil numerik, ketidakpastian, sumber, dan dampak sebelum mengambil keputusan.</a:t>
             </a:r>
           </a:p>
         </p:txBody>
@@ -19086,7 +19010,7 @@
           <p:nvPr/>
         </p:nvPicPr>
         <p:blipFill>
-          <a:blip xmlns:r="http://schemas.openxmlformats.org/officeDocument/2006/relationships" xmlns:a="http://schemas.openxmlformats.org/drawingml/2006/main" r:embed="R86f3fa627edd4592"/>
+          <a:blip xmlns:r="http://schemas.openxmlformats.org/officeDocument/2006/relationships" xmlns:a="http://schemas.openxmlformats.org/drawingml/2006/main" r:embed="R070fc151b5ee4d9d"/>
           <a:stretch xmlns:a="http://schemas.openxmlformats.org/drawingml/2006/main">
             <a:fillRect l="0" t="0" r="0" b="0"/>
           </a:stretch>
@@ -20217,7 +20141,7 @@
           <p:nvPr/>
         </p:nvPicPr>
         <p:blipFill>
-          <a:blip xmlns:r="http://schemas.openxmlformats.org/officeDocument/2006/relationships" xmlns:a="http://schemas.openxmlformats.org/drawingml/2006/main" r:embed="R89ae9711bb6d4808"/>
+          <a:blip xmlns:r="http://schemas.openxmlformats.org/officeDocument/2006/relationships" xmlns:a="http://schemas.openxmlformats.org/drawingml/2006/main" r:embed="R38e44e3b246f476b"/>
           <a:stretch xmlns:a="http://schemas.openxmlformats.org/drawingml/2006/main">
             <a:fillRect l="0" t="0" r="0" b="0"/>
           </a:stretch>
@@ -22321,7 +22245,7 @@
           <p:nvPr/>
         </p:nvPicPr>
         <p:blipFill>
-          <a:blip xmlns:r="http://schemas.openxmlformats.org/officeDocument/2006/relationships" xmlns:a="http://schemas.openxmlformats.org/drawingml/2006/main" r:embed="R28952d3036824898"/>
+          <a:blip xmlns:r="http://schemas.openxmlformats.org/officeDocument/2006/relationships" xmlns:a="http://schemas.openxmlformats.org/drawingml/2006/main" r:embed="Ra27aee6aeebe4e8e"/>
           <a:stretch xmlns:a="http://schemas.openxmlformats.org/drawingml/2006/main">
             <a:fillRect l="0" t="0" r="0" b="0"/>
           </a:stretch>
@@ -23603,7 +23527,7 @@
           <p:nvPr/>
         </p:nvPicPr>
         <p:blipFill>
-          <a:blip xmlns:r="http://schemas.openxmlformats.org/officeDocument/2006/relationships" xmlns:a="http://schemas.openxmlformats.org/drawingml/2006/main" r:embed="Rc53d8737ebf0447a"/>
+          <a:blip xmlns:r="http://schemas.openxmlformats.org/officeDocument/2006/relationships" xmlns:a="http://schemas.openxmlformats.org/drawingml/2006/main" r:embed="Rc9ce069e7ef44c3c"/>
           <a:stretch xmlns:a="http://schemas.openxmlformats.org/drawingml/2006/main">
             <a:fillRect l="0" t="0" r="0" b="0"/>
           </a:stretch>
@@ -23882,7 +23806,7 @@
           <p:nvPr/>
         </p:nvPicPr>
         <p:blipFill>
-          <a:blip xmlns:r="http://schemas.openxmlformats.org/officeDocument/2006/relationships" xmlns:a="http://schemas.openxmlformats.org/drawingml/2006/main" r:embed="R53d594f23c8341b7"/>
+          <a:blip xmlns:r="http://schemas.openxmlformats.org/officeDocument/2006/relationships" xmlns:a="http://schemas.openxmlformats.org/drawingml/2006/main" r:embed="R7ff94076e9d04671"/>
           <a:stretch xmlns:a="http://schemas.openxmlformats.org/drawingml/2006/main">
             <a:fillRect l="0" t="0" r="0" b="0"/>
           </a:stretch>
@@ -25962,7 +25886,7 @@
           <p:nvPr/>
         </p:nvPicPr>
         <p:blipFill>
-          <a:blip xmlns:r="http://schemas.openxmlformats.org/officeDocument/2006/relationships" xmlns:a="http://schemas.openxmlformats.org/drawingml/2006/main" r:embed="R42875d020a214b2d"/>
+          <a:blip xmlns:r="http://schemas.openxmlformats.org/officeDocument/2006/relationships" xmlns:a="http://schemas.openxmlformats.org/drawingml/2006/main" r:embed="Rb1ece324b69e4682"/>
           <a:stretch xmlns:a="http://schemas.openxmlformats.org/drawingml/2006/main">
             <a:fillRect l="0" t="0" r="0" b="0"/>
           </a:stretch>
@@ -27375,7 +27299,7 @@
           <p:nvPr/>
         </p:nvPicPr>
         <p:blipFill>
-          <a:blip xmlns:r="http://schemas.openxmlformats.org/officeDocument/2006/relationships" xmlns:a="http://schemas.openxmlformats.org/drawingml/2006/main" r:embed="Rf98f46436ff74cb6"/>
+          <a:blip xmlns:r="http://schemas.openxmlformats.org/officeDocument/2006/relationships" xmlns:a="http://schemas.openxmlformats.org/drawingml/2006/main" r:embed="Rcf366e9fdeae48c2"/>
           <a:stretch xmlns:a="http://schemas.openxmlformats.org/drawingml/2006/main">
             <a:fillRect l="0" t="0" r="0" b="0"/>
           </a:stretch>
